--- a/Презентация.pptx
+++ b/Презентация.pptx
@@ -8291,14 +8291,7 @@
                 <a:latin typeface="Arial" panose="020B0604020202020204" pitchFamily="34" charset="0"/>
                 <a:cs typeface="Arial" panose="020B0604020202020204" pitchFamily="34" charset="0"/>
               </a:rPr>
-              <a:t> Михаила </a:t>
-            </a:r>
-            <a:r>
-              <a:rPr lang="ru-RU" sz="2000" dirty="0" smtClean="0">
-                <a:latin typeface="Arial" panose="020B0604020202020204" pitchFamily="34" charset="0"/>
-                <a:cs typeface="Arial" panose="020B0604020202020204" pitchFamily="34" charset="0"/>
-              </a:rPr>
-              <a:t>Алексеевича</a:t>
+              <a:t> Михаила Алексеевича</a:t>
             </a:r>
             <a:endParaRPr lang="ru-RU" sz="2000" dirty="0">
               <a:latin typeface="Arial" panose="020B0604020202020204" pitchFamily="34" charset="0"/>
@@ -8688,6 +8681,13 @@
   <p:clrMapOvr>
     <a:masterClrMapping/>
   </p:clrMapOvr>
+  <p:timing>
+    <p:tnLst>
+      <p:par>
+        <p:cTn id="1" dur="indefinite" restart="never" nodeType="tmRoot"/>
+      </p:par>
+    </p:tnLst>
+  </p:timing>
 </p:sld>
 </file>
 
@@ -8953,6 +8953,13 @@
   <p:clrMapOvr>
     <a:masterClrMapping/>
   </p:clrMapOvr>
+  <p:timing>
+    <p:tnLst>
+      <p:par>
+        <p:cTn id="1" dur="indefinite" restart="never" nodeType="tmRoot"/>
+      </p:par>
+    </p:tnLst>
+  </p:timing>
 </p:sld>
 </file>
 
@@ -9063,6 +9070,13 @@
   <p:clrMapOvr>
     <a:masterClrMapping/>
   </p:clrMapOvr>
+  <p:timing>
+    <p:tnLst>
+      <p:par>
+        <p:cTn id="1" dur="indefinite" restart="never" nodeType="tmRoot"/>
+      </p:par>
+    </p:tnLst>
+  </p:timing>
 </p:sld>
 </file>
 
@@ -9147,7 +9161,7 @@
         </p:nvSpPr>
         <p:spPr>
           <a:xfrm>
-            <a:off x="961761" y="531092"/>
+            <a:off x="1327521" y="531092"/>
             <a:ext cx="4952253" cy="584775"/>
           </a:xfrm>
           <a:prstGeom prst="rect">
@@ -9165,14 +9179,7 @@
                 <a:latin typeface="Arial" panose="020B0604020202020204" pitchFamily="34" charset="0"/>
                 <a:cs typeface="Arial" panose="020B0604020202020204" pitchFamily="34" charset="0"/>
               </a:rPr>
-              <a:t>  Разработка </a:t>
-            </a:r>
-            <a:r>
-              <a:rPr lang="ru-RU" sz="3200" b="1" dirty="0" smtClean="0">
-                <a:latin typeface="Arial" panose="020B0604020202020204" pitchFamily="34" charset="0"/>
-                <a:cs typeface="Arial" panose="020B0604020202020204" pitchFamily="34" charset="0"/>
-              </a:rPr>
-              <a:t>Веб-</a:t>
+              <a:t>  Разработка Веб-</a:t>
             </a:r>
             <a:r>
               <a:rPr lang="ru-RU" sz="3200" b="1" dirty="0">
@@ -9214,8 +9221,8 @@
         </p:blipFill>
         <p:spPr bwMode="auto">
           <a:xfrm>
-            <a:off x="4654550" y="2730182"/>
-            <a:ext cx="6610350" cy="3245168"/>
+            <a:off x="2075498" y="2909888"/>
+            <a:ext cx="6196965" cy="3586161"/>
           </a:xfrm>
           <a:prstGeom prst="rect">
             <a:avLst/>
@@ -9241,6 +9248,13 @@
   <p:clrMapOvr>
     <a:masterClrMapping/>
   </p:clrMapOvr>
+  <p:timing>
+    <p:tnLst>
+      <p:par>
+        <p:cTn id="1" dur="indefinite" restart="never" nodeType="tmRoot"/>
+      </p:par>
+    </p:tnLst>
+  </p:timing>
 </p:sld>
 </file>
 
@@ -9358,6 +9372,13 @@
   <p:clrMapOvr>
     <a:masterClrMapping/>
   </p:clrMapOvr>
+  <p:timing>
+    <p:tnLst>
+      <p:par>
+        <p:cTn id="1" dur="indefinite" restart="never" nodeType="tmRoot"/>
+      </p:par>
+    </p:tnLst>
+  </p:timing>
 </p:sld>
 </file>
 
@@ -9476,6 +9497,13 @@
   <p:clrMapOvr>
     <a:masterClrMapping/>
   </p:clrMapOvr>
+  <p:timing>
+    <p:tnLst>
+      <p:par>
+        <p:cTn id="1" dur="indefinite" restart="never" nodeType="tmRoot"/>
+      </p:par>
+    </p:tnLst>
+  </p:timing>
 </p:sld>
 </file>
 
@@ -9511,7 +9539,7 @@
         <p:spPr>
           <a:xfrm>
             <a:off x="976187" y="1218401"/>
-            <a:ext cx="10239626" cy="4149854"/>
+            <a:ext cx="10239626" cy="3323987"/>
           </a:xfrm>
           <a:prstGeom prst="rect">
             <a:avLst/>
@@ -9534,7 +9562,28 @@
                 <a:latin typeface="Arial" pitchFamily="34" charset="0"/>
                 <a:cs typeface="Arial" pitchFamily="34" charset="0"/>
               </a:rPr>
-              <a:t>В результате практической подготовки в виде производственной практики был проведён анализ предметной области, спроектирован и разработан Телеграм – Бот, который помогает консультантам находить товары по его артикулу.</a:t>
+              <a:t>В результате практической подготовки в виде производственной практики был проведен анализ предметной области, спроектирована и разработано </a:t>
+            </a:r>
+            <a:r>
+              <a:rPr lang="ru-RU" sz="2000" dirty="0" err="1">
+                <a:latin typeface="Arial" pitchFamily="34" charset="0"/>
+                <a:cs typeface="Arial" pitchFamily="34" charset="0"/>
+              </a:rPr>
+              <a:t>web</a:t>
+            </a:r>
+            <a:r>
+              <a:rPr lang="ru-RU" sz="2000" dirty="0">
+                <a:latin typeface="Arial" pitchFamily="34" charset="0"/>
+                <a:cs typeface="Arial" pitchFamily="34" charset="0"/>
+              </a:rPr>
+              <a:t>-приложение для расчета стоимости мобильной </a:t>
+            </a:r>
+            <a:r>
+              <a:rPr lang="ru-RU" sz="2000" dirty="0" smtClean="0">
+                <a:latin typeface="Arial" pitchFamily="34" charset="0"/>
+                <a:cs typeface="Arial" pitchFamily="34" charset="0"/>
+              </a:rPr>
+              <a:t>связи.</a:t>
             </a:r>
           </a:p>
           <a:p>
@@ -9544,30 +9593,30 @@
               </a:lnSpc>
             </a:pPr>
             <a:r>
+              <a:rPr lang="ru-RU" sz="2000" dirty="0" smtClean="0">
+                <a:latin typeface="Arial" pitchFamily="34" charset="0"/>
+                <a:cs typeface="Arial" pitchFamily="34" charset="0"/>
+              </a:rPr>
+              <a:t>Это </a:t>
+            </a:r>
+            <a:r>
               <a:rPr lang="ru-RU" sz="2000" dirty="0">
                 <a:latin typeface="Arial" pitchFamily="34" charset="0"/>
                 <a:cs typeface="Arial" pitchFamily="34" charset="0"/>
               </a:rPr>
-              <a:t>Это позволяет сделать вывод, что поставленные цели и задачи выполнены в полном объеме.</a:t>
-            </a:r>
-            <a:endParaRPr lang="en-US" sz="2000" dirty="0">
+              <a:t>позволяет сделать вывод, что поставленные цели и задачи выполнены в полном объеме</a:t>
+            </a:r>
+            <a:r>
+              <a:rPr lang="ru-RU" sz="2000" dirty="0" smtClean="0">
+                <a:latin typeface="Arial" pitchFamily="34" charset="0"/>
+                <a:cs typeface="Arial" pitchFamily="34" charset="0"/>
+              </a:rPr>
+              <a:t>.</a:t>
+            </a:r>
+            <a:endParaRPr lang="ru-RU" sz="2000" dirty="0">
               <a:latin typeface="Arial" panose="020B0604020202020204" pitchFamily="34" charset="0"/>
               <a:cs typeface="Arial" pitchFamily="34" charset="0"/>
             </a:endParaRPr>
-          </a:p>
-          <a:p>
-            <a:pPr indent="450000" algn="just">
-              <a:lnSpc>
-                <a:spcPct val="150000"/>
-              </a:lnSpc>
-            </a:pPr>
-            <a:r>
-              <a:rPr lang="ru-RU" sz="2000" dirty="0">
-                <a:latin typeface="Arial" panose="020B0604020202020204" pitchFamily="34" charset="0"/>
-                <a:cs typeface="Arial" pitchFamily="34" charset="0"/>
-              </a:rPr>
-              <a:t>В дальнейшем данный Чат-Бот может быть Улучшен добавление поиска по наименованию, выводу файла с остатками товаров и т.д.</a:t>
-            </a:r>
           </a:p>
           <a:p>
             <a:pPr indent="450000" algn="just">
@@ -9594,25 +9643,42 @@
               <a:t>Проект находится по ссылке</a:t>
             </a:r>
             <a:r>
+              <a:rPr lang="en-US" sz="2000" dirty="0" smtClean="0">
+                <a:latin typeface="Arial" panose="020B0604020202020204" pitchFamily="34" charset="0"/>
+                <a:cs typeface="Arial" pitchFamily="34" charset="0"/>
+              </a:rPr>
+              <a:t>:</a:t>
+            </a:r>
+            <a:r>
+              <a:rPr lang="ru-RU" sz="2000" dirty="0" smtClean="0">
+                <a:latin typeface="Arial" panose="020B0604020202020204" pitchFamily="34" charset="0"/>
+                <a:cs typeface="Arial" pitchFamily="34" charset="0"/>
+              </a:rPr>
+              <a:t> </a:t>
+            </a:r>
+            <a:r>
+              <a:rPr lang="en-US" sz="2000" dirty="0" smtClean="0">
+                <a:latin typeface="Arial" panose="020B0604020202020204" pitchFamily="34" charset="0"/>
+                <a:cs typeface="Arial" pitchFamily="34" charset="0"/>
+                <a:hlinkClick r:id="rId2"/>
+              </a:rPr>
+              <a:t>https</a:t>
+            </a:r>
+            <a:r>
               <a:rPr lang="en-US" sz="2000" dirty="0">
                 <a:latin typeface="Arial" panose="020B0604020202020204" pitchFamily="34" charset="0"/>
                 <a:cs typeface="Arial" pitchFamily="34" charset="0"/>
+                <a:hlinkClick r:id="rId2"/>
               </a:rPr>
-              <a:t>: </a:t>
-            </a:r>
-            <a:r>
-              <a:rPr lang="en-US" sz="2000" dirty="0">
+              <a:t>://github.com/APET138</a:t>
+            </a:r>
+            <a:r>
+              <a:rPr lang="en-US" sz="2000" dirty="0" smtClean="0">
                 <a:latin typeface="Arial" panose="020B0604020202020204" pitchFamily="34" charset="0"/>
                 <a:cs typeface="Arial" pitchFamily="34" charset="0"/>
-                <a:hlinkClick r:id="rId2">
-                  <a:extLst>
-                    <a:ext uri="{A12FA001-AC4F-418D-AE19-62706E023703}">
-                      <ahyp:hlinkClr xmlns="" xmlns:ahyp="http://schemas.microsoft.com/office/drawing/2018/hyperlinkcolor" val="tx"/>
-                    </a:ext>
-                  </a:extLst>
-                </a:hlinkClick>
+                <a:hlinkClick r:id="rId2"/>
               </a:rPr>
-              <a:t>https://github.com/IvanShvidko/Praktika01</a:t>
+              <a:t>/</a:t>
             </a:r>
             <a:endParaRPr lang="ru-RU" sz="2000" dirty="0">
               <a:latin typeface="Arial" panose="020B0604020202020204" pitchFamily="34" charset="0"/>
@@ -9672,6 +9738,13 @@
   <p:clrMapOvr>
     <a:masterClrMapping/>
   </p:clrMapOvr>
+  <p:timing>
+    <p:tnLst>
+      <p:par>
+        <p:cTn id="1" dur="indefinite" restart="never" nodeType="tmRoot"/>
+      </p:par>
+    </p:tnLst>
+  </p:timing>
 </p:sld>
 </file>
 
@@ -10297,10 +10370,6 @@
               </a:rPr>
               <a:t> Михаила Алексеевича</a:t>
             </a:r>
-            <a:endParaRPr lang="ru-RU" sz="2000" dirty="0">
-              <a:latin typeface="Arial" panose="020B0604020202020204" pitchFamily="34" charset="0"/>
-              <a:cs typeface="Arial" panose="020B0604020202020204" pitchFamily="34" charset="0"/>
-            </a:endParaRPr>
           </a:p>
         </p:txBody>
       </p:sp>
@@ -10685,6 +10754,13 @@
   <p:clrMapOvr>
     <a:masterClrMapping/>
   </p:clrMapOvr>
+  <p:timing>
+    <p:tnLst>
+      <p:par>
+        <p:cTn id="1" dur="indefinite" restart="never" nodeType="tmRoot"/>
+      </p:par>
+    </p:tnLst>
+  </p:timing>
 </p:sld>
 </file>
 
